--- a/public/downloads/US-114055-Ethics-Professionalism.pptx
+++ b/public/downloads/US-114055-Ethics-Professionalism.pptx
@@ -18267,7 +18267,67 @@
         </p:nvSpPr>
         <p:spPr>
           <a:xfrm>
-            <a:off x="502920" y="2487168"/>
+            <a:off x="502920" y="2395728"/>
+            <a:ext cx="11183112" cy="292608"/>
+          </a:xfrm>
+          <a:prstGeom prst="rect">
+            <a:avLst/>
+          </a:prstGeom>
+          <a:noFill/>
+          <a:ln/>
+        </p:spPr>
+        <p:txBody>
+          <a:bodyPr wrap="square" rtlCol="0" anchor="ctr"/>
+          <a:lstStyle/>
+          <a:p>
+            <a:pPr indent="0" marL="0">
+              <a:buNone/>
+            </a:pPr>
+            <a:r>
+              <a:rPr lang="en-US" sz="1350" dirty="0">
+                <a:solidFill>
+                  <a:srgbClr val="002050"/>
+                </a:solidFill>
+                <a:latin typeface="Aptos" pitchFamily="34" charset="0"/>
+                <a:ea typeface="Aptos" pitchFamily="34" charset="-122"/>
+                <a:cs typeface="Aptos" pitchFamily="34" charset="-120"/>
+              </a:rPr>
+              <a:t>Read the Institute's current Constitution: </a:t>
+            </a:r>
+            <a:pPr indent="0" marL="0">
+              <a:buNone/>
+            </a:pPr>
+            <a:r>
+              <a:rPr lang="en-US" sz="1350" b="1" u="sng" dirty="0">
+                <a:solidFill>
+                  <a:srgbClr val="0F6CBD"/>
+                </a:solidFill>
+                <a:latin typeface="Aptos" pitchFamily="34" charset="0"/>
+                <a:ea typeface="Aptos" pitchFamily="34" charset="-122"/>
+                <a:cs typeface="Aptos" pitchFamily="34" charset="-120"/>
+                <a:hlinkClick r:id="rId1" invalidUrl="" action="" tgtFrame="" tooltip="IITPSA Constitution" history="1" highlightClick="0" endSnd="0">
+                  <a:extLst>
+                    <a:ext uri="{A12FA001-AC4F-418D-AE19-62706E023703}">
+                      <ahyp:hlinkClr xmlns:ahyp="http://schemas.microsoft.com/office/drawing/2018/hyperlinkcolor" val="tx"/>
+                    </a:ext>
+                  </a:extLst>
+                </a:hlinkClick>
+              </a:rPr>
+              <a:t>www.iitpsa.org.za/constitution</a:t>
+            </a:r>
+            <a:endParaRPr lang="en-US" sz="1350" dirty="0"/>
+          </a:p>
+        </p:txBody>
+      </p:sp>
+      <p:sp>
+        <p:nvSpPr>
+          <p:cNvPr id="9" name="Text 7"/>
+          <p:cNvSpPr/>
+          <p:nvPr/>
+        </p:nvSpPr>
+        <p:spPr>
+          <a:xfrm>
+            <a:off x="502920" y="2743200"/>
             <a:ext cx="11183112" cy="274320"/>
           </a:xfrm>
           <a:prstGeom prst="rect">
@@ -18300,13 +18360,13 @@
       </p:sp>
       <p:sp>
         <p:nvSpPr>
-          <p:cNvPr id="9" name="Shape 7"/>
-          <p:cNvSpPr/>
-          <p:nvPr/>
-        </p:nvSpPr>
-        <p:spPr>
-          <a:xfrm>
-            <a:off x="502920" y="2788920"/>
+          <p:cNvPr id="10" name="Shape 8"/>
+          <p:cNvSpPr/>
+          <p:nvPr/>
+        </p:nvSpPr>
+        <p:spPr>
+          <a:xfrm>
+            <a:off x="502920" y="3035808"/>
             <a:ext cx="457200" cy="457200"/>
           </a:xfrm>
           <a:prstGeom prst="ellipse">
@@ -18320,13 +18380,13 @@
       </p:sp>
       <p:sp>
         <p:nvSpPr>
-          <p:cNvPr id="10" name="Text 8"/>
-          <p:cNvSpPr/>
-          <p:nvPr/>
-        </p:nvSpPr>
-        <p:spPr>
-          <a:xfrm>
-            <a:off x="502920" y="2788920"/>
+          <p:cNvPr id="11" name="Text 9"/>
+          <p:cNvSpPr/>
+          <p:nvPr/>
+        </p:nvSpPr>
+        <p:spPr>
+          <a:xfrm>
+            <a:off x="502920" y="3035808"/>
             <a:ext cx="457200" cy="457200"/>
           </a:xfrm>
           <a:prstGeom prst="rect">
@@ -18359,14 +18419,14 @@
       </p:sp>
       <p:sp>
         <p:nvSpPr>
-          <p:cNvPr id="11" name="Text 9"/>
-          <p:cNvSpPr/>
-          <p:nvPr/>
-        </p:nvSpPr>
-        <p:spPr>
-          <a:xfrm>
-            <a:off x="1161288" y="2743200"/>
-            <a:ext cx="10360152" cy="374904"/>
+          <p:cNvPr id="12" name="Text 10"/>
+          <p:cNvSpPr/>
+          <p:nvPr/>
+        </p:nvSpPr>
+        <p:spPr>
+          <a:xfrm>
+            <a:off x="1161288" y="2990088"/>
+            <a:ext cx="10360152" cy="338328"/>
           </a:xfrm>
           <a:prstGeom prst="rect">
             <a:avLst/>
@@ -18401,13 +18461,13 @@
       </p:sp>
       <p:sp>
         <p:nvSpPr>
-          <p:cNvPr id="12" name="Shape 10"/>
-          <p:cNvSpPr/>
-          <p:nvPr/>
-        </p:nvSpPr>
-        <p:spPr>
-          <a:xfrm>
-            <a:off x="502920" y="3300984"/>
+          <p:cNvPr id="13" name="Shape 11"/>
+          <p:cNvSpPr/>
+          <p:nvPr/>
+        </p:nvSpPr>
+        <p:spPr>
+          <a:xfrm>
+            <a:off x="502920" y="3511296"/>
             <a:ext cx="457200" cy="457200"/>
           </a:xfrm>
           <a:prstGeom prst="ellipse">
@@ -18421,13 +18481,13 @@
       </p:sp>
       <p:sp>
         <p:nvSpPr>
-          <p:cNvPr id="13" name="Text 11"/>
-          <p:cNvSpPr/>
-          <p:nvPr/>
-        </p:nvSpPr>
-        <p:spPr>
-          <a:xfrm>
-            <a:off x="502920" y="3300984"/>
+          <p:cNvPr id="14" name="Text 12"/>
+          <p:cNvSpPr/>
+          <p:nvPr/>
+        </p:nvSpPr>
+        <p:spPr>
+          <a:xfrm>
+            <a:off x="502920" y="3511296"/>
             <a:ext cx="457200" cy="457200"/>
           </a:xfrm>
           <a:prstGeom prst="rect">
@@ -18460,14 +18520,14 @@
       </p:sp>
       <p:sp>
         <p:nvSpPr>
-          <p:cNvPr id="14" name="Text 12"/>
-          <p:cNvSpPr/>
-          <p:nvPr/>
-        </p:nvSpPr>
-        <p:spPr>
-          <a:xfrm>
-            <a:off x="1161288" y="3255264"/>
-            <a:ext cx="10360152" cy="374904"/>
+          <p:cNvPr id="15" name="Text 13"/>
+          <p:cNvSpPr/>
+          <p:nvPr/>
+        </p:nvSpPr>
+        <p:spPr>
+          <a:xfrm>
+            <a:off x="1161288" y="3465576"/>
+            <a:ext cx="10360152" cy="338328"/>
           </a:xfrm>
           <a:prstGeom prst="rect">
             <a:avLst/>
@@ -18502,13 +18562,13 @@
       </p:sp>
       <p:sp>
         <p:nvSpPr>
-          <p:cNvPr id="15" name="Shape 13"/>
-          <p:cNvSpPr/>
-          <p:nvPr/>
-        </p:nvSpPr>
-        <p:spPr>
-          <a:xfrm>
-            <a:off x="502920" y="3813048"/>
+          <p:cNvPr id="16" name="Shape 14"/>
+          <p:cNvSpPr/>
+          <p:nvPr/>
+        </p:nvSpPr>
+        <p:spPr>
+          <a:xfrm>
+            <a:off x="502920" y="3986784"/>
             <a:ext cx="457200" cy="457200"/>
           </a:xfrm>
           <a:prstGeom prst="ellipse">
@@ -18522,13 +18582,13 @@
       </p:sp>
       <p:sp>
         <p:nvSpPr>
-          <p:cNvPr id="16" name="Text 14"/>
-          <p:cNvSpPr/>
-          <p:nvPr/>
-        </p:nvSpPr>
-        <p:spPr>
-          <a:xfrm>
-            <a:off x="502920" y="3813048"/>
+          <p:cNvPr id="17" name="Text 15"/>
+          <p:cNvSpPr/>
+          <p:nvPr/>
+        </p:nvSpPr>
+        <p:spPr>
+          <a:xfrm>
+            <a:off x="502920" y="3986784"/>
             <a:ext cx="457200" cy="457200"/>
           </a:xfrm>
           <a:prstGeom prst="rect">
@@ -18561,14 +18621,14 @@
       </p:sp>
       <p:sp>
         <p:nvSpPr>
-          <p:cNvPr id="17" name="Text 15"/>
-          <p:cNvSpPr/>
-          <p:nvPr/>
-        </p:nvSpPr>
-        <p:spPr>
-          <a:xfrm>
-            <a:off x="1161288" y="3767328"/>
-            <a:ext cx="10360152" cy="374904"/>
+          <p:cNvPr id="18" name="Text 16"/>
+          <p:cNvSpPr/>
+          <p:nvPr/>
+        </p:nvSpPr>
+        <p:spPr>
+          <a:xfrm>
+            <a:off x="1161288" y="3941064"/>
+            <a:ext cx="10360152" cy="338328"/>
           </a:xfrm>
           <a:prstGeom prst="rect">
             <a:avLst/>
@@ -18603,13 +18663,13 @@
       </p:sp>
       <p:sp>
         <p:nvSpPr>
-          <p:cNvPr id="18" name="Shape 16"/>
-          <p:cNvSpPr/>
-          <p:nvPr/>
-        </p:nvSpPr>
-        <p:spPr>
-          <a:xfrm>
-            <a:off x="502920" y="4325112"/>
+          <p:cNvPr id="19" name="Shape 17"/>
+          <p:cNvSpPr/>
+          <p:nvPr/>
+        </p:nvSpPr>
+        <p:spPr>
+          <a:xfrm>
+            <a:off x="502920" y="4462272"/>
             <a:ext cx="457200" cy="457200"/>
           </a:xfrm>
           <a:prstGeom prst="ellipse">
@@ -18623,13 +18683,13 @@
       </p:sp>
       <p:sp>
         <p:nvSpPr>
-          <p:cNvPr id="19" name="Text 17"/>
-          <p:cNvSpPr/>
-          <p:nvPr/>
-        </p:nvSpPr>
-        <p:spPr>
-          <a:xfrm>
-            <a:off x="502920" y="4325112"/>
+          <p:cNvPr id="20" name="Text 18"/>
+          <p:cNvSpPr/>
+          <p:nvPr/>
+        </p:nvSpPr>
+        <p:spPr>
+          <a:xfrm>
+            <a:off x="502920" y="4462272"/>
             <a:ext cx="457200" cy="457200"/>
           </a:xfrm>
           <a:prstGeom prst="rect">
@@ -18662,14 +18722,14 @@
       </p:sp>
       <p:sp>
         <p:nvSpPr>
-          <p:cNvPr id="20" name="Text 18"/>
-          <p:cNvSpPr/>
-          <p:nvPr/>
-        </p:nvSpPr>
-        <p:spPr>
-          <a:xfrm>
-            <a:off x="1161288" y="4279392"/>
-            <a:ext cx="10360152" cy="374904"/>
+          <p:cNvPr id="21" name="Text 19"/>
+          <p:cNvSpPr/>
+          <p:nvPr/>
+        </p:nvSpPr>
+        <p:spPr>
+          <a:xfrm>
+            <a:off x="1161288" y="4416552"/>
+            <a:ext cx="10360152" cy="338328"/>
           </a:xfrm>
           <a:prstGeom prst="rect">
             <a:avLst/>
@@ -18704,7 +18764,7 @@
       </p:sp>
       <p:sp>
         <p:nvSpPr>
-          <p:cNvPr id="21" name="Shape 19"/>
+          <p:cNvPr id="22" name="Shape 20"/>
           <p:cNvSpPr/>
           <p:nvPr/>
         </p:nvSpPr>
@@ -18738,17 +18798,17 @@
       </p:sp>
       <p:pic>
         <p:nvPicPr>
-          <p:cNvPr id="22" name="Image 0" descr="preencoded.png">    </p:cNvPr>
+          <p:cNvPr id="23" name="Image 0" descr="preencoded.png">    </p:cNvPr>
           <p:cNvPicPr>
             <a:picLocks noChangeAspect="1"/>
           </p:cNvPicPr>
           <p:nvPr/>
         </p:nvPicPr>
         <p:blipFill>
-          <a:blip r:embed="rId1">
+          <a:blip r:embed="rId2">
             <a:extLst>
               <a:ext uri="{96DAC541-7B7A-43D3-8B79-37D633B846F1}">
-                <asvg:svgBlip xmlns:asvg="http://schemas.microsoft.com/office/drawing/2016/SVG/main" r:embed="rId2"/>
+                <asvg:svgBlip xmlns:asvg="http://schemas.microsoft.com/office/drawing/2016/SVG/main" r:embed="rId3"/>
               </a:ext>
             </a:extLst>
           </a:blip>
@@ -18768,7 +18828,7 @@
       </p:pic>
       <p:sp>
         <p:nvSpPr>
-          <p:cNvPr id="23" name="Text 20"/>
+          <p:cNvPr id="24" name="Text 21"/>
           <p:cNvSpPr/>
           <p:nvPr/>
         </p:nvSpPr>

--- a/public/downloads/US-114055-Ethics-Professionalism.pptx
+++ b/public/downloads/US-114055-Ethics-Professionalism.pptx
@@ -3930,9 +3930,9 @@
             <a:prstDash val="solid"/>
           </a:ln>
           <a:effectLst>
-            <a:outerShdw sx="100000" sy="100000" kx="0" ky="0" algn="bl" rotWithShape="0" blurRad="2.524374906065939e+62" dist="7.212499731616968e+61" dir="4.2316648611840007e+73">
+            <a:outerShdw sx="100000" sy="100000" kx="0" ky="0" algn="bl" rotWithShape="0" blurRad="88900" dist="25400" dir="5400000">
               <a:srgbClr val="9AB4CC">
-                <a:alpha val="2.9999999999999995e+74"/>
+                <a:alpha val="30000"/>
               </a:srgbClr>
             </a:outerShdw>
           </a:effectLst>
@@ -4074,9 +4074,9 @@
             <a:prstDash val="solid"/>
           </a:ln>
           <a:effectLst>
-            <a:outerShdw sx="100000" sy="100000" kx="0" ky="0" algn="bl" rotWithShape="0" blurRad="3.2059561307037426e+66" dist="9.15987465915355e+65" dir="2.5389989167104004e+78">
+            <a:outerShdw sx="100000" sy="100000" kx="0" ky="0" algn="bl" rotWithShape="0" blurRad="88900" dist="25400" dir="5400000">
               <a:srgbClr val="9AB4CC">
-                <a:alpha val="3e+79"/>
+                <a:alpha val="30000"/>
               </a:srgbClr>
             </a:outerShdw>
           </a:effectLst>
@@ -4218,9 +4218,9 @@
             <a:prstDash val="solid"/>
           </a:ln>
           <a:effectLst>
-            <a:outerShdw sx="100000" sy="100000" kx="0" ky="0" algn="bl" rotWithShape="0" blurRad="4.071564285993753e+70" dist="1.1633040817125008e+70" dir="1.5233993500262402e+83">
+            <a:outerShdw sx="100000" sy="100000" kx="0" ky="0" algn="bl" rotWithShape="0" blurRad="88900" dist="25400" dir="5400000">
               <a:srgbClr val="9AB4CC">
-                <a:alpha val="2.9999999999999995e+84"/>
+                <a:alpha val="30000"/>
               </a:srgbClr>
             </a:outerShdw>
           </a:effectLst>
@@ -4362,9 +4362,9 @@
             <a:prstDash val="solid"/>
           </a:ln>
           <a:effectLst>
-            <a:outerShdw sx="100000" sy="100000" kx="0" ky="0" algn="bl" rotWithShape="0" blurRad="5.170886643212067e+74" dist="1.477396183774876e+74" dir="9.14039610015744e+87">
+            <a:outerShdw sx="100000" sy="100000" kx="0" ky="0" algn="bl" rotWithShape="0" blurRad="88900" dist="25400" dir="5400000">
               <a:srgbClr val="9AB4CC">
-                <a:alpha val="2.9999999999999996e+89"/>
+                <a:alpha val="30000"/>
               </a:srgbClr>
             </a:outerShdw>
           </a:effectLst>
@@ -4753,9 +4753,9 @@
             <a:prstDash val="solid"/>
           </a:ln>
           <a:effectLst>
-            <a:outerShdw sx="100000" sy="100000" kx="0" ky="0" algn="bl" rotWithShape="0" blurRad="6.567026036879325e+78" dist="1.8762931533940924e+78" dir="5.484237660094465e+92">
+            <a:outerShdw sx="100000" sy="100000" kx="0" ky="0" algn="bl" rotWithShape="0" blurRad="88900" dist="25400" dir="5400000">
               <a:srgbClr val="9AB4CC">
-                <a:alpha val="2.9999999999999997e+94"/>
+                <a:alpha val="30000"/>
               </a:srgbClr>
             </a:outerShdw>
           </a:effectLst>
@@ -4897,9 +4897,9 @@
             <a:prstDash val="solid"/>
           </a:ln>
           <a:effectLst>
-            <a:outerShdw sx="100000" sy="100000" kx="0" ky="0" algn="bl" rotWithShape="0" blurRad="8.340123066836742e+82" dist="2.3828923048104974e+82" dir="3.2905425960566786e+97">
+            <a:outerShdw sx="100000" sy="100000" kx="0" ky="0" algn="bl" rotWithShape="0" blurRad="88900" dist="25400" dir="5400000">
               <a:srgbClr val="9AB4CC">
-                <a:alpha val="2.9999999999999997e+99"/>
+                <a:alpha val="30000"/>
               </a:srgbClr>
             </a:outerShdw>
           </a:effectLst>
@@ -5318,9 +5318,9 @@
             <a:prstDash val="solid"/>
           </a:ln>
           <a:effectLst>
-            <a:outerShdw sx="100000" sy="100000" kx="0" ky="0" algn="bl" rotWithShape="0" blurRad="1.0591956294882662e+87" dist="3.0262732271093317e+86" dir="1.9743255576340073e+102">
+            <a:outerShdw sx="100000" sy="100000" kx="0" ky="0" algn="bl" rotWithShape="0" blurRad="88900" dist="25400" dir="5400000">
               <a:srgbClr val="9AB4CC">
-                <a:alpha val="3e+104"/>
+                <a:alpha val="30000"/>
               </a:srgbClr>
             </a:outerShdw>
           </a:effectLst>
@@ -5462,9 +5462,9 @@
             <a:prstDash val="solid"/>
           </a:ln>
           <a:effectLst>
-            <a:outerShdw sx="100000" sy="100000" kx="0" ky="0" algn="bl" rotWithShape="0" blurRad="1.3451784494500981e+91" dist="3.8433669984288512e+90" dir="1.1845953345804043e+107">
+            <a:outerShdw sx="100000" sy="100000" kx="0" ky="0" algn="bl" rotWithShape="0" blurRad="88900" dist="25400" dir="5400000">
               <a:srgbClr val="9AB4CC">
-                <a:alpha val="2.9999999999999997e+109"/>
+                <a:alpha val="30000"/>
               </a:srgbClr>
             </a:outerShdw>
           </a:effectLst>
@@ -5606,9 +5606,9 @@
             <a:prstDash val="solid"/>
           </a:ln>
           <a:effectLst>
-            <a:outerShdw sx="100000" sy="100000" kx="0" ky="0" algn="bl" rotWithShape="0" blurRad="1.7083766308016246e+95" dist="4.8810760880046414e+94" dir="7.107572007482426e+111">
+            <a:outerShdw sx="100000" sy="100000" kx="0" ky="0" algn="bl" rotWithShape="0" blurRad="88900" dist="25400" dir="5400000">
               <a:srgbClr val="9AB4CC">
-                <a:alpha val="2.9999999999999995e+114"/>
+                <a:alpha val="30000"/>
               </a:srgbClr>
             </a:outerShdw>
           </a:effectLst>
@@ -5750,9 +5750,9 @@
             <a:prstDash val="solid"/>
           </a:ln>
           <a:effectLst>
-            <a:outerShdw sx="100000" sy="100000" kx="0" ky="0" algn="bl" rotWithShape="0" blurRad="2.1696383211180632e+99" dist="6.198966631765894e+98" dir="4.2645432044894554e+116">
+            <a:outerShdw sx="100000" sy="100000" kx="0" ky="0" algn="bl" rotWithShape="0" blurRad="88900" dist="25400" dir="5400000">
               <a:srgbClr val="9AB4CC">
-                <a:alpha val="2.9999999999999997e+119"/>
+                <a:alpha val="30000"/>
               </a:srgbClr>
             </a:outerShdw>
           </a:effectLst>
@@ -8406,9 +8406,9 @@
             <a:prstDash val="solid"/>
           </a:ln>
           <a:effectLst>
-            <a:outerShdw sx="100000" sy="100000" kx="0" ky="0" algn="bl" rotWithShape="0" blurRad="2.7554406678199403e+103" dist="7.872687622342685e+102" dir="2.5587259226936733e+121">
+            <a:outerShdw sx="100000" sy="100000" kx="0" ky="0" algn="bl" rotWithShape="0" blurRad="88900" dist="25400" dir="5400000">
               <a:srgbClr val="9AB4CC">
-                <a:alpha val="2.9999999999999995e+124"/>
+                <a:alpha val="30000"/>
               </a:srgbClr>
             </a:outerShdw>
           </a:effectLst>
@@ -8550,9 +8550,9 @@
             <a:prstDash val="solid"/>
           </a:ln>
           <a:effectLst>
-            <a:outerShdw sx="100000" sy="100000" kx="0" ky="0" algn="bl" rotWithShape="0" blurRad="3.499409648131324e+107" dist="9.998313280375211e+106" dir="1.535235553616204e+126">
+            <a:outerShdw sx="100000" sy="100000" kx="0" ky="0" algn="bl" rotWithShape="0" blurRad="88900" dist="25400" dir="5400000">
               <a:srgbClr val="9AB4CC">
-                <a:alpha val="2.9999999999999997e+129"/>
+                <a:alpha val="30000"/>
               </a:srgbClr>
             </a:outerShdw>
           </a:effectLst>
@@ -8694,9 +8694,9 @@
             <a:prstDash val="solid"/>
           </a:ln>
           <a:effectLst>
-            <a:outerShdw sx="100000" sy="100000" kx="0" ky="0" algn="bl" rotWithShape="0" blurRad="4.4442502531267815e+111" dist="1.2697857866076517e+111" dir="9.211413321697224e+130">
+            <a:outerShdw sx="100000" sy="100000" kx="0" ky="0" algn="bl" rotWithShape="0" blurRad="88900" dist="25400" dir="5400000">
               <a:srgbClr val="9AB4CC">
-                <a:alpha val="2.9999999999999996e+134"/>
+                <a:alpha val="30000"/>
               </a:srgbClr>
             </a:outerShdw>
           </a:effectLst>
@@ -9085,9 +9085,9 @@
             <a:prstDash val="solid"/>
           </a:ln>
           <a:effectLst>
-            <a:outerShdw sx="100000" sy="100000" kx="0" ky="0" algn="bl" rotWithShape="0" blurRad="5.644197821471012e+115" dist="1.6126279489917177e+115" dir="5.526847993018334e+135">
+            <a:outerShdw sx="100000" sy="100000" kx="0" ky="0" algn="bl" rotWithShape="0" blurRad="88900" dist="25400" dir="5400000">
               <a:srgbClr val="9AB4CC">
-                <a:alpha val="2.9999999999999994e+139"/>
+                <a:alpha val="30000"/>
               </a:srgbClr>
             </a:outerShdw>
           </a:effectLst>
@@ -9229,9 +9229,9 @@
             <a:prstDash val="solid"/>
           </a:ln>
           <a:effectLst>
-            <a:outerShdw sx="100000" sy="100000" kx="0" ky="0" algn="bl" rotWithShape="0" blurRad="7.168131233268186e+119" dist="2.0480374952194813e+119" dir="3.3161087958110005e+140">
+            <a:outerShdw sx="100000" sy="100000" kx="0" ky="0" algn="bl" rotWithShape="0" blurRad="88900" dist="25400" dir="5400000">
               <a:srgbClr val="9AB4CC">
-                <a:alpha val="2.9999999999999996e+144"/>
+                <a:alpha val="30000"/>
               </a:srgbClr>
             </a:outerShdw>
           </a:effectLst>
@@ -9373,9 +9373,9 @@
             <a:prstDash val="solid"/>
           </a:ln>
           <a:effectLst>
-            <a:outerShdw sx="100000" sy="100000" kx="0" ky="0" algn="bl" rotWithShape="0" blurRad="9.103526666250596e+123" dist="2.6010076189287412e+123" dir="1.9896652774866004e+145">
+            <a:outerShdw sx="100000" sy="100000" kx="0" ky="0" algn="bl" rotWithShape="0" blurRad="88900" dist="25400" dir="5400000">
               <a:srgbClr val="9AB4CC">
-                <a:alpha val="2.9999999999999996e+149"/>
+                <a:alpha val="30000"/>
               </a:srgbClr>
             </a:outerShdw>
           </a:effectLst>
@@ -9517,9 +9517,9 @@
             <a:prstDash val="solid"/>
           </a:ln>
           <a:effectLst>
-            <a:outerShdw sx="100000" sy="100000" kx="0" ky="0" algn="bl" rotWithShape="0" blurRad="1.1561478866138256e+128" dist="3.303279676039501e+127" dir="1.1937991664919603e+150">
+            <a:outerShdw sx="100000" sy="100000" kx="0" ky="0" algn="bl" rotWithShape="0" blurRad="88900" dist="25400" dir="5400000">
               <a:srgbClr val="9AB4CC">
-                <a:alpha val="2.9999999999999997e+154"/>
+                <a:alpha val="30000"/>
               </a:srgbClr>
             </a:outerShdw>
           </a:effectLst>
@@ -9869,9 +9869,9 @@
             <a:prstDash val="solid"/>
           </a:ln>
           <a:effectLst>
-            <a:outerShdw sx="100000" sy="100000" kx="0" ky="0" algn="bl" rotWithShape="0" blurRad="1.4683078159995586e+132" dist="4.195165188570166e+131" dir="7.162794998951762e+154">
+            <a:outerShdw sx="100000" sy="100000" kx="0" ky="0" algn="bl" rotWithShape="0" blurRad="88900" dist="25400" dir="5400000">
               <a:srgbClr val="9AB4CC">
-                <a:alpha val="2.9999999999999998e+159"/>
+                <a:alpha val="30000"/>
               </a:srgbClr>
             </a:outerShdw>
           </a:effectLst>
@@ -10013,9 +10013,9 @@
             <a:prstDash val="solid"/>
           </a:ln>
           <a:effectLst>
-            <a:outerShdw sx="100000" sy="100000" kx="0" ky="0" algn="bl" rotWithShape="0" blurRad="1.8647509263194394e+136" dist="5.327859789484111e+135" dir="4.297676999371057e+159">
+            <a:outerShdw sx="100000" sy="100000" kx="0" ky="0" algn="bl" rotWithShape="0" blurRad="88900" dist="25400" dir="5400000">
               <a:srgbClr val="9AB4CC">
-                <a:alpha val="3e+164"/>
+                <a:alpha val="30000"/>
               </a:srgbClr>
             </a:outerShdw>
           </a:effectLst>
@@ -13815,9 +13815,9 @@
             <a:prstDash val="solid"/>
           </a:ln>
           <a:effectLst>
-            <a:outerShdw sx="100000" sy="100000" kx="0" ky="0" algn="bl" rotWithShape="0" blurRad="2.368233676425688e+140" dist="6.766381932644821e+139" dir="2.5786061996226343e+164">
+            <a:outerShdw sx="100000" sy="100000" kx="0" ky="0" algn="bl" rotWithShape="0" blurRad="88900" dist="25400" dir="5400000">
               <a:srgbClr val="9AB4CC">
-                <a:alpha val="3e+169"/>
+                <a:alpha val="30000"/>
               </a:srgbClr>
             </a:outerShdw>
           </a:effectLst>
@@ -13959,9 +13959,9 @@
             <a:prstDash val="solid"/>
           </a:ln>
           <a:effectLst>
-            <a:outerShdw sx="100000" sy="100000" kx="0" ky="0" algn="bl" rotWithShape="0" blurRad="3.0076567690606238e+144" dist="8.593305054458923e+143" dir="1.5471637197735807e+169">
+            <a:outerShdw sx="100000" sy="100000" kx="0" ky="0" algn="bl" rotWithShape="0" blurRad="88900" dist="25400" dir="5400000">
               <a:srgbClr val="9AB4CC">
-                <a:alpha val="3e+174"/>
+                <a:alpha val="30000"/>
               </a:srgbClr>
             </a:outerShdw>
           </a:effectLst>
@@ -14103,9 +14103,9 @@
             <a:prstDash val="solid"/>
           </a:ln>
           <a:effectLst>
-            <a:outerShdw sx="100000" sy="100000" kx="0" ky="0" algn="bl" rotWithShape="0" blurRad="3.819724096706992e+148" dist="1.0913497419162833e+148" dir="9.282982318641485e+173">
+            <a:outerShdw sx="100000" sy="100000" kx="0" ky="0" algn="bl" rotWithShape="0" blurRad="88900" dist="25400" dir="5400000">
               <a:srgbClr val="9AB4CC">
-                <a:alpha val="3e+179"/>
+                <a:alpha val="30000"/>
               </a:srgbClr>
             </a:outerShdw>
           </a:effectLst>
@@ -14756,9 +14756,9 @@
             <a:prstDash val="solid"/>
           </a:ln>
           <a:effectLst>
-            <a:outerShdw sx="100000" sy="100000" kx="0" ky="0" algn="bl" rotWithShape="0" blurRad="4.85104960281788e+152" dist="1.38601417223368e+152" dir="5.569789391184891e+178">
+            <a:outerShdw sx="100000" sy="100000" kx="0" ky="0" algn="bl" rotWithShape="0" blurRad="88900" dist="25400" dir="5400000">
               <a:srgbClr val="9AB4CC">
-                <a:alpha val="3e+184"/>
+                <a:alpha val="30000"/>
               </a:srgbClr>
             </a:outerShdw>
           </a:effectLst>
@@ -14900,9 +14900,9 @@
             <a:prstDash val="solid"/>
           </a:ln>
           <a:effectLst>
-            <a:outerShdw sx="100000" sy="100000" kx="0" ky="0" algn="bl" rotWithShape="0" blurRad="6.160832995578707e+156" dist="1.7602379987367734e+156" dir="3.3418736347109347e+183">
+            <a:outerShdw sx="100000" sy="100000" kx="0" ky="0" algn="bl" rotWithShape="0" blurRad="88900" dist="25400" dir="5400000">
               <a:srgbClr val="9AB4CC">
-                <a:alpha val="3e+189"/>
+                <a:alpha val="30000"/>
               </a:srgbClr>
             </a:outerShdw>
           </a:effectLst>
@@ -15044,9 +15044,9 @@
             <a:prstDash val="solid"/>
           </a:ln>
           <a:effectLst>
-            <a:outerShdw sx="100000" sy="100000" kx="0" ky="0" algn="bl" rotWithShape="0" blurRad="7.824257904384958e+160" dist="2.235502258395702e+160" dir="2.0051241808265608e+188">
+            <a:outerShdw sx="100000" sy="100000" kx="0" ky="0" algn="bl" rotWithShape="0" blurRad="88900" dist="25400" dir="5400000">
               <a:srgbClr val="9AB4CC">
-                <a:alpha val="2.9999999999999997e+194"/>
+                <a:alpha val="30000"/>
               </a:srgbClr>
             </a:outerShdw>
           </a:effectLst>
@@ -15188,9 +15188,9 @@
             <a:prstDash val="solid"/>
           </a:ln>
           <a:effectLst>
-            <a:outerShdw sx="100000" sy="100000" kx="0" ky="0" algn="bl" rotWithShape="0" blurRad="9.936807538568897e+164" dist="2.8390878681625417e+164" dir="1.2030745084959364e+193">
+            <a:outerShdw sx="100000" sy="100000" kx="0" ky="0" algn="bl" rotWithShape="0" blurRad="88900" dist="25400" dir="5400000">
               <a:srgbClr val="9AB4CC">
-                <a:alpha val="2.9999999999999997e+199"/>
+                <a:alpha val="30000"/>
               </a:srgbClr>
             </a:outerShdw>
           </a:effectLst>
@@ -15332,9 +15332,9 @@
             <a:prstDash val="solid"/>
           </a:ln>
           <a:effectLst>
-            <a:outerShdw sx="100000" sy="100000" kx="0" ky="0" algn="bl" rotWithShape="0" blurRad="1.26197455739825e+169" dist="3.605641592566428e+168" dir="7.218447050975619e+197">
+            <a:outerShdw sx="100000" sy="100000" kx="0" ky="0" algn="bl" rotWithShape="0" blurRad="88900" dist="25400" dir="5400000">
               <a:srgbClr val="9AB4CC">
-                <a:alpha val="3e+204"/>
+                <a:alpha val="30000"/>
               </a:srgbClr>
             </a:outerShdw>
           </a:effectLst>
@@ -16801,9 +16801,9 @@
             <a:prstDash val="solid"/>
           </a:ln>
           <a:effectLst>
-            <a:outerShdw sx="100000" sy="100000" kx="0" ky="0" algn="bl" rotWithShape="0" blurRad="1.6027076878957775e+173" dist="4.579164822559364e+172" dir="4.3310682305853715e+202">
+            <a:outerShdw sx="100000" sy="100000" kx="0" ky="0" algn="bl" rotWithShape="0" blurRad="88900" dist="25400" dir="5400000">
               <a:srgbClr val="9AB4CC">
-                <a:alpha val="3e+209"/>
+                <a:alpha val="30000"/>
               </a:srgbClr>
             </a:outerShdw>
           </a:effectLst>
@@ -17352,9 +17352,9 @@
             <a:prstDash val="solid"/>
           </a:ln>
           <a:effectLst>
-            <a:outerShdw sx="100000" sy="100000" kx="0" ky="0" algn="bl" rotWithShape="0" blurRad="2.0354387636276376e+177" dist="5.815539324650392e+176" dir="2.598640938351223e+207">
+            <a:outerShdw sx="100000" sy="100000" kx="0" ky="0" algn="bl" rotWithShape="0" blurRad="88900" dist="25400" dir="5400000">
               <a:srgbClr val="9AB4CC">
-                <a:alpha val="2.9999999999999996e+214"/>
+                <a:alpha val="30000"/>
               </a:srgbClr>
             </a:outerShdw>
           </a:effectLst>
@@ -19700,9 +19700,9 @@
             <a:prstDash val="solid"/>
           </a:ln>
           <a:effectLst>
-            <a:outerShdw sx="100000" sy="100000" kx="0" ky="0" algn="bl" rotWithShape="0" blurRad="1129030000" dist="322580000" dir="324000000000">
+            <a:outerShdw sx="100000" sy="100000" kx="0" ky="0" algn="bl" rotWithShape="0" blurRad="88900" dist="25400" dir="5400000">
               <a:srgbClr val="9AB4CC">
-                <a:alpha val="3000000000"/>
+                <a:alpha val="30000"/>
               </a:srgbClr>
             </a:outerShdw>
           </a:effectLst>
@@ -20101,9 +20101,9 @@
             <a:prstDash val="solid"/>
           </a:ln>
           <a:effectLst>
-            <a:outerShdw sx="100000" sy="100000" kx="0" ky="0" algn="bl" rotWithShape="0" blurRad="14338681000000" dist="4096766000000" dir="19440000000000000">
+            <a:outerShdw sx="100000" sy="100000" kx="0" ky="0" algn="bl" rotWithShape="0" blurRad="88900" dist="25400" dir="5400000">
               <a:srgbClr val="9AB4CC">
-                <a:alpha val="300000000000000"/>
+                <a:alpha val="30000"/>
               </a:srgbClr>
             </a:outerShdw>
           </a:effectLst>
@@ -20245,9 +20245,9 @@
             <a:prstDash val="solid"/>
           </a:ln>
           <a:effectLst>
-            <a:outerShdw sx="100000" sy="100000" kx="0" ky="0" algn="bl" rotWithShape="0" blurRad="182101248700000000" dist="52028928200000000" dir="1.1664e+21">
+            <a:outerShdw sx="100000" sy="100000" kx="0" ky="0" algn="bl" rotWithShape="0" blurRad="88900" dist="25400" dir="5400000">
               <a:srgbClr val="9AB4CC">
-                <a:alpha val="30000000000000000000"/>
+                <a:alpha val="30000"/>
               </a:srgbClr>
             </a:outerShdw>
           </a:effectLst>
@@ -20389,9 +20389,9 @@
             <a:prstDash val="solid"/>
           </a:ln>
           <a:effectLst>
-            <a:outerShdw sx="100000" sy="100000" kx="0" ky="0" algn="bl" rotWithShape="0" blurRad="2.31268585849e+21" dist="660767388140000000000" dir="6.9984e+25">
+            <a:outerShdw sx="100000" sy="100000" kx="0" ky="0" algn="bl" rotWithShape="0" blurRad="88900" dist="25400" dir="5400000">
               <a:srgbClr val="9AB4CC">
-                <a:alpha val="3e+24"/>
+                <a:alpha val="30000"/>
               </a:srgbClr>
             </a:outerShdw>
           </a:effectLst>
@@ -20780,9 +20780,9 @@
             <a:prstDash val="solid"/>
           </a:ln>
           <a:effectLst>
-            <a:outerShdw sx="100000" sy="100000" kx="0" ky="0" algn="bl" rotWithShape="0" blurRad="2.9371110402823e+25" dist="8.391745829378e+24" dir="4.19904e+30">
+            <a:outerShdw sx="100000" sy="100000" kx="0" ky="0" algn="bl" rotWithShape="0" blurRad="88900" dist="25400" dir="5400000">
               <a:srgbClr val="9AB4CC">
-                <a:alpha val="3e+29"/>
+                <a:alpha val="30000"/>
               </a:srgbClr>
             </a:outerShdw>
           </a:effectLst>
@@ -20946,9 +20946,9 @@
             <a:prstDash val="solid"/>
           </a:ln>
           <a:effectLst>
-            <a:outerShdw sx="100000" sy="100000" kx="0" ky="0" algn="bl" rotWithShape="0" blurRad="3.730131021158521e+29" dist="1.0657517203310059e+29" dir="2.519424e+35">
+            <a:outerShdw sx="100000" sy="100000" kx="0" ky="0" algn="bl" rotWithShape="0" blurRad="88900" dist="25400" dir="5400000">
               <a:srgbClr val="9AB4CC">
-                <a:alpha val="2.9999999999999997e+34"/>
+                <a:alpha val="30000"/>
               </a:srgbClr>
             </a:outerShdw>
           </a:effectLst>
@@ -21092,9 +21092,9 @@
             <a:prstDash val="solid"/>
           </a:ln>
           <a:effectLst>
-            <a:outerShdw sx="100000" sy="100000" kx="0" ky="0" algn="bl" rotWithShape="0" blurRad="4.737266396871321e+33" dist="1.3535046848203775e+33" dir="1.5116544e+40">
+            <a:outerShdw sx="100000" sy="100000" kx="0" ky="0" algn="bl" rotWithShape="0" blurRad="88900" dist="25400" dir="5400000">
               <a:srgbClr val="9AB4CC">
-                <a:alpha val="3e+39"/>
+                <a:alpha val="30000"/>
               </a:srgbClr>
             </a:outerShdw>
           </a:effectLst>
@@ -21216,9 +21216,9 @@
             <a:prstDash val="solid"/>
           </a:ln>
           <a:effectLst>
-            <a:outerShdw sx="100000" sy="100000" kx="0" ky="0" algn="bl" rotWithShape="0" blurRad="6.016328324026578e+37" dist="1.7189509497218795e+37" dir="9.069926400000001e+44">
+            <a:outerShdw sx="100000" sy="100000" kx="0" ky="0" algn="bl" rotWithShape="0" blurRad="88900" dist="25400" dir="5400000">
               <a:srgbClr val="9AB4CC">
-                <a:alpha val="3e+44"/>
+                <a:alpha val="30000"/>
               </a:srgbClr>
             </a:outerShdw>
           </a:effectLst>
@@ -21340,9 +21340,9 @@
             <a:prstDash val="solid"/>
           </a:ln>
           <a:effectLst>
-            <a:outerShdw sx="100000" sy="100000" kx="0" ky="0" algn="bl" rotWithShape="0" blurRad="7.640736971513755e+41" dist="2.183067706146787e+41" dir="5.44195584e+49">
+            <a:outerShdw sx="100000" sy="100000" kx="0" ky="0" algn="bl" rotWithShape="0" blurRad="88900" dist="25400" dir="5400000">
               <a:srgbClr val="9AB4CC">
-                <a:alpha val="2.9999999999999997e+49"/>
+                <a:alpha val="30000"/>
               </a:srgbClr>
             </a:outerShdw>
           </a:effectLst>
@@ -21704,9 +21704,9 @@
             <a:prstDash val="solid"/>
           </a:ln>
           <a:effectLst>
-            <a:outerShdw sx="100000" sy="100000" kx="0" ky="0" algn="bl" rotWithShape="0" blurRad="9.703735953822469e+45" dist="2.7724959868064195e+45" dir="3.2651735040000005e+54">
+            <a:outerShdw sx="100000" sy="100000" kx="0" ky="0" algn="bl" rotWithShape="0" blurRad="88900" dist="25400" dir="5400000">
               <a:srgbClr val="9AB4CC">
-                <a:alpha val="2.9999999999999996e+54"/>
+                <a:alpha val="30000"/>
               </a:srgbClr>
             </a:outerShdw>
           </a:effectLst>
@@ -21848,9 +21848,9 @@
             <a:prstDash val="solid"/>
           </a:ln>
           <a:effectLst>
-            <a:outerShdw sx="100000" sy="100000" kx="0" ky="0" algn="bl" rotWithShape="0" blurRad="1.2323744661354536e+50" dist="3.5210699032441527e+49" dir="1.9591041024000004e+59">
+            <a:outerShdw sx="100000" sy="100000" kx="0" ky="0" algn="bl" rotWithShape="0" blurRad="88900" dist="25400" dir="5400000">
               <a:srgbClr val="9AB4CC">
-                <a:alpha val="2.9999999999999996e+59"/>
+                <a:alpha val="30000"/>
               </a:srgbClr>
             </a:outerShdw>
           </a:effectLst>
@@ -21992,9 +21992,9 @@
             <a:prstDash val="solid"/>
           </a:ln>
           <a:effectLst>
-            <a:outerShdw sx="100000" sy="100000" kx="0" ky="0" algn="bl" rotWithShape="0" blurRad="1.5651155719920262e+54" dist="4.471758777120074e+53" dir="1.1754624614400003e+64">
+            <a:outerShdw sx="100000" sy="100000" kx="0" ky="0" algn="bl" rotWithShape="0" blurRad="88900" dist="25400" dir="5400000">
               <a:srgbClr val="9AB4CC">
-                <a:alpha val="2.9999999999999996e+64"/>
+                <a:alpha val="30000"/>
               </a:srgbClr>
             </a:outerShdw>
           </a:effectLst>
@@ -22136,9 +22136,9 @@
             <a:prstDash val="solid"/>
           </a:ln>
           <a:effectLst>
-            <a:outerShdw sx="100000" sy="100000" kx="0" ky="0" algn="bl" rotWithShape="0" blurRad="1.9876967764298733e+58" dist="5.679133646942494e+57" dir="7.052774768640002e+68">
+            <a:outerShdw sx="100000" sy="100000" kx="0" ky="0" algn="bl" rotWithShape="0" blurRad="88900" dist="25400" dir="5400000">
               <a:srgbClr val="9AB4CC">
-                <a:alpha val="2.9999999999999995e+69"/>
+                <a:alpha val="30000"/>
               </a:srgbClr>
             </a:outerShdw>
           </a:effectLst>
